--- a/artifacts/slides/autopilot.pptx
+++ b/artifacts/slides/autopilot.pptx
@@ -506,7 +506,7 @@
               <a:t>Autopilot Mode: what it does, where value comes from, and the bounded control story.,Exact lifecycle: experimental. The official CLI README lists Autopilot under experimental features; client behavior and limits should be rechecked.,Verification date: 2026-10-14. Evidence older than 30 days requires re-review.,This is independent enablement for a controlled pilot, not production certification or customer-specific approval.,Cost detail: Current enterprise billing is token-based AI credits, not a fixed promise of one billable request per task. Autonomous work, retries, and frontier models change cost. The README's legacy premium-request text is not used as enterprise pricing evidence.,Explicit assumptions:
 One synthetic task with a measurable test suite.
 Approved model, effective tenant budget, and no permission bypass.
-A continuation or runtime limit is not evidence of a hard billed-spend cap.,Complete assessment: https://github.com/hammadorg93/copilot-runway/blob/main/features/autopilot/assessment.md,Presenter runbook: https://github.com/hammadorg93/copilot-runway/blob/main/demos/autopilot/README.md,Kit validation: kit-tested. Live feature validation: not-run.,Remote cleanup: No remote state is created by this kit. Stop the session before local reset and return the CLI to the prior mode/settings.,Primary sources:
+A continuation or runtime limit is not evidence of a hard billed-spend cap.,Complete assessment: https://github.com/aj-enns/copilot-runway/blob/main/features/autopilot/assessment.md,Presenter runbook: https://github.com/aj-enns/copilot-runway/blob/main/demos/autopilot/README.md,Kit validation: kit-tested. Live feature validation: not-run.,Remote cleanup: No remote state is created by this kit. Stop the session before local reset and return the CLI to the prior mode/settings.,Primary sources:
 Copilot CLI README: experimental mode: https://github.com/github/copilot-cli/blob/76c3172eb38f5e7537b90b9800a7023d81156438/README.md
 Usage-based billing for organizations and enterprises: https://docs.github.com/en/copilot/concepts/billing-and-usage/organizations-and-enterprises/billing
 Copilot CLI v1.0.97 release notes: https://github.com/github/copilot-cli/releases/tag/v1.0.97
@@ -603,7 +603,7 @@
               <a:t>Autopilot Mode: pilot decision, evidence gaps, cost assumptions, and how to start the repeatable demo kit.,Exact lifecycle: experimental. The official CLI README lists Autopilot under experimental features; client behavior and limits should be rechecked.,Verification date: 2026-10-14. Evidence older than 30 days requires re-review.,This is independent enablement for a controlled pilot, not production certification or customer-specific approval.,Cost detail: Current enterprise billing is token-based AI credits, not a fixed promise of one billable request per task. Autonomous work, retries, and frontier models change cost. The README's legacy premium-request text is not used as enterprise pricing evidence.,Explicit assumptions:
 One synthetic task with a measurable test suite.
 Approved model, effective tenant budget, and no permission bypass.
-A continuation or runtime limit is not evidence of a hard billed-spend cap.,Complete assessment: https://github.com/hammadorg93/copilot-runway/blob/main/features/autopilot/assessment.md,Presenter runbook: https://github.com/hammadorg93/copilot-runway/blob/main/demos/autopilot/README.md,Kit validation: kit-tested. Live feature validation: not-run.,Remote cleanup: No remote state is created by this kit. Stop the session before local reset and return the CLI to the prior mode/settings.,Primary sources:
+A continuation or runtime limit is not evidence of a hard billed-spend cap.,Complete assessment: https://github.com/aj-enns/copilot-runway/blob/main/features/autopilot/assessment.md,Presenter runbook: https://github.com/aj-enns/copilot-runway/blob/main/demos/autopilot/README.md,Kit validation: kit-tested. Live feature validation: not-run.,Remote cleanup: No remote state is created by this kit. Stop the session before local reset and return the CLI to the prior mode/settings.,Primary sources:
 Copilot CLI README: experimental mode: https://github.com/github/copilot-cli/blob/76c3172eb38f5e7537b90b9800a7023d81156438/README.md
 Usage-based billing for organizations and enterprises: https://docs.github.com/en/copilot/concepts/billing-and-usage/organizations-and-enterprises/billing
 Copilot CLI v1.0.97 release notes: https://github.com/github/copilot-cli/releases/tag/v1.0.97

--- a/artifacts/slides/autopilot.pptx
+++ b/artifacts/slides/autopilot.pptx
@@ -2322,13 +2322,13 @@
             <a:r>
               <a:rPr lang="en-US" sz="3000" b="1" dirty="0">
                 <a:solidFill>
-                  <a:srgbClr val="B11F4B"/>
-                </a:solidFill>
-                <a:latin typeface="Aptos" pitchFamily="34" charset="0"/>
-                <a:ea typeface="Aptos" pitchFamily="34" charset="-122"/>
-                <a:cs typeface="Aptos" pitchFamily="34" charset="-120"/>
-              </a:rPr>
-              <a:t>Pilot with conditions</a:t>
+                  <a:srgbClr val="B91C1C"/>
+                </a:solidFill>
+                <a:latin typeface="Aptos" pitchFamily="34" charset="0"/>
+                <a:ea typeface="Aptos" pitchFamily="34" charset="-122"/>
+                <a:cs typeface="Aptos" pitchFamily="34" charset="-120"/>
+              </a:rPr>
+              <a:t>Hold for evidence</a:t>
             </a:r>
             <a:endParaRPr lang="en-US" sz="3000" dirty="0"/>
           </a:p>
